--- a/data/memories/memory_01/locales/es/documents/presentations/Presentation Q3 FINAL.pptx
+++ b/data/memories/memory_01/locales/es/documents/presentations/Presentation Q3 FINAL.pptx
@@ -3108,7 +3108,7 @@
           <a:lstStyle/>
           <a:p>
             <a:r>
-              <a:t>Q3 Executive Review</a:t>
+              <a:t>Revisión ejecutiva del tercer trimestre</a:t>
             </a:r>
           </a:p>
         </p:txBody>
@@ -3132,7 +3132,7 @@
               <a:defRPr sz="2200"/>
             </a:pPr>
             <a:r>
-              <a:t>Summary of quarterly performance.</a:t>
+              <a:t>Resumen del desempeño trimestral.</a:t>
             </a:r>
           </a:p>
           <a:p>
@@ -3140,7 +3140,7 @@
               <a:defRPr sz="2200"/>
             </a:pPr>
             <a:r>
-              <a:t>Prepared for management distribution.</a:t>
+              <a:t>Preparado para distribución gerencial.</a:t>
             </a:r>
           </a:p>
         </p:txBody>
@@ -3179,7 +3179,7 @@
           <a:lstStyle/>
           <a:p>
             <a:r>
-              <a:t>Financial Results</a:t>
+              <a:t>Resultados Financieros</a:t>
             </a:r>
           </a:p>
         </p:txBody>
@@ -3203,7 +3203,7 @@
               <a:defRPr sz="2200"/>
             </a:pPr>
             <a:r>
-              <a:t>Budget performance reviewed.</a:t>
+              <a:t>Se revisa el desempeño del presupuesto.</a:t>
             </a:r>
           </a:p>
           <a:p>
@@ -3211,7 +3211,7 @@
               <a:defRPr sz="2200"/>
             </a:pPr>
             <a:r>
-              <a:t>Minor deviations identified.</a:t>
+              <a:t>Desviaciones menores identificadas.</a:t>
             </a:r>
           </a:p>
           <a:p>
@@ -3219,7 +3219,7 @@
               <a:defRPr sz="2200"/>
             </a:pPr>
             <a:r>
-              <a:t>Corrective actions implemented.</a:t>
+              <a:t>Acciones correctivas implementadas.</a:t>
             </a:r>
           </a:p>
         </p:txBody>
@@ -3258,7 +3258,7 @@
           <a:lstStyle/>
           <a:p>
             <a:r>
-              <a:t>Operational Improvements</a:t>
+              <a:t>Mejoras operativas</a:t>
             </a:r>
           </a:p>
         </p:txBody>
@@ -3282,7 +3282,7 @@
               <a:defRPr sz="2200"/>
             </a:pPr>
             <a:r>
-              <a:t>Improved document management procedures.</a:t>
+              <a:t>Mejora de los procedimientos de gestión documental.</a:t>
             </a:r>
           </a:p>
           <a:p>
@@ -3290,7 +3290,7 @@
               <a:defRPr sz="2200"/>
             </a:pPr>
             <a:r>
-              <a:t>Updated internal workflows.</a:t>
+              <a:t>Flujos de trabajo internos actualizados.</a:t>
             </a:r>
           </a:p>
           <a:p>
@@ -3298,7 +3298,7 @@
               <a:defRPr sz="2200"/>
             </a:pPr>
             <a:r>
-              <a:t>Archive organisation progressing.</a:t>
+              <a:t>La organización del archivo avanza.</a:t>
             </a:r>
           </a:p>
         </p:txBody>
@@ -3337,7 +3337,7 @@
           <a:lstStyle/>
           <a:p>
             <a:r>
-              <a:t>Organisation Update</a:t>
+              <a:t>Actualización de la organización</a:t>
             </a:r>
           </a:p>
         </p:txBody>
@@ -3361,7 +3361,7 @@
               <a:defRPr sz="2200"/>
             </a:pPr>
             <a:r>
-              <a:t>New structure implemented.</a:t>
+              <a:t>Nueva estructura implementada.</a:t>
             </a:r>
           </a:p>
           <a:p>
@@ -3369,7 +3369,7 @@
               <a:defRPr sz="2200"/>
             </a:pPr>
             <a:r>
-              <a:t>Responsibilities redistributed.</a:t>
+              <a:t>Responsabilidades redistribuidas.</a:t>
             </a:r>
           </a:p>
           <a:p>
@@ -3377,7 +3377,7 @@
               <a:defRPr sz="2200"/>
             </a:pPr>
             <a:r>
-              <a:t>Transition completed.</a:t>
+              <a:t>Transición completada.</a:t>
             </a:r>
           </a:p>
         </p:txBody>
@@ -3416,7 +3416,7 @@
           <a:lstStyle/>
           <a:p>
             <a:r>
-              <a:t>Next Steps</a:t>
+              <a:t>Próximos pasos</a:t>
             </a:r>
           </a:p>
         </p:txBody>
@@ -3440,7 +3440,7 @@
               <a:defRPr sz="2200"/>
             </a:pPr>
             <a:r>
-              <a:t>Continue digital archive project.</a:t>
+              <a:t>Continuar proyecto de archivo digital.</a:t>
             </a:r>
           </a:p>
           <a:p>
@@ -3448,7 +3448,7 @@
               <a:defRPr sz="2200"/>
             </a:pPr>
             <a:r>
-              <a:t>Complete remaining documentation updates.</a:t>
+              <a:t>Complete las actualizaciones de la documentación restante.</a:t>
             </a:r>
           </a:p>
           <a:p>
@@ -3456,7 +3456,7 @@
               <a:defRPr sz="2200"/>
             </a:pPr>
             <a:r>
-              <a:t>Review future improvements.</a:t>
+              <a:t>Revisar futuras mejoras.</a:t>
             </a:r>
           </a:p>
         </p:txBody>
